--- a/docs/competition/答辩PPT-GiftWise-修订版-2026-10-31.pptx
+++ b/docs/competition/答辩PPT-GiftWise-修订版-2026-10-31.pptx
@@ -3600,7 +3600,7 @@
                 <a:ea typeface="Microsoft YaHei"/>
                 <a:cs typeface="Consolas"/>
               </a:rPr>
-              <a:t>快照 HEAD ae0ea58 · origin/main == main == 37493f9（领先 0）</a:t>
+              <a:t>交付分支 release/2026-11-01-submission · 1923 个文件的内容冻结 · 提交号以 git ls-remote 为准</a:t>
             </a:r>
           </a:p>
         </p:txBody>
@@ -4284,7 +4284,7 @@
                 <a:ea typeface="+mn-ea"/>
                 <a:cs typeface="+mn-cs"/>
               </a:rPr>
-              <a:t>以半开方式只发一半请求正文，旧镜像 25 秒零</a:t>
+              <a:t>以半开方式只发一半请求正文，旧镜像在 25 秒观察窗口内零响应，连接从不关闭。</a:t>
             </a:r>
           </a:p>
         </p:txBody>

--- a/docs/competition/答辩PPT-GiftWise-修订版-2026-10-31.pptx
+++ b/docs/competition/答辩PPT-GiftWise-修订版-2026-10-31.pptx
@@ -3600,7 +3600,7 @@
                 <a:ea typeface="Microsoft YaHei"/>
                 <a:cs typeface="Consolas"/>
               </a:rPr>
-              <a:t>交付分支 release/2026-11-01-submission · 1923 个文件的内容冻结 · 提交号以 git ls-remote 为准</a:t>
+              <a:t>交付分支 1923 文件内容冻结 · 提交号以 git ls-remote 为准</a:t>
             </a:r>
           </a:p>
         </p:txBody>
@@ -4284,7 +4284,7 @@
                 <a:ea typeface="+mn-ea"/>
                 <a:cs typeface="+mn-cs"/>
               </a:rPr>
-              <a:t>以半开方式只发一半请求正文，旧镜像在 25 秒观察窗口内零响应，连接从不关闭。</a:t>
+              <a:t>只发一半的请求正文，旧镜像 25 秒窗口内零响应、不关连接。</a:t>
             </a:r>
           </a:p>
         </p:txBody>

--- a/docs/competition/答辩PPT-GiftWise-修订版-2026-10-31.pptx
+++ b/docs/competition/答辩PPT-GiftWise-修订版-2026-10-31.pptx
@@ -904,7 +904,7 @@
             <a:pPr/>
             <a:r>
               <a:rPr lang="zh-CN" dirty="0"/>
-              <a:t>另外 Dify 的版本号是 1.18.0，我们用 GET /console/api/version 实读，stage C 独立复跑过两次；PPT 上标「未核实」是我漏了，以 1.18.0 为准。</a:t>
+              <a:t>另外 Dify 的版本号是 1.18.0，我们用 GET /console/api/version 实读，stage C 独立复跑过两次；投影上已注明「仓库已核实」，以 1.18.0 为准。</a:t>
             </a:r>
           </a:p>
         </p:txBody>
@@ -1090,7 +1090,7 @@
             <a:pPr/>
             <a:r>
               <a:rPr lang="zh-CN" dirty="0"/>
-              <a:t>A1，本机探针 46 条、单元测试 329 条通过。</a:t>
+              <a:t>A1，本机探针 46 条、单元测试 329 条通过（四条互不包含套件 329＋275＋39＋45 合计 688；329 仅为第一条）。</a:t>
             </a:r>
           </a:p>
           <a:p>
@@ -1249,7 +1249,7 @@
             <a:pPr/>
             <a:r>
               <a:rPr lang="zh-CN" dirty="0"/>
-              <a:t>每张卡下面我都留了红色的未完成项，比如 trace 不可用、N4 的 ELSE 分支从未触发、阶段 14 的可观测性代码写了但没进默认镜像、也没实测。</a:t>
+              <a:t>每张卡下面我都留了红色的未完成项，比如 trace 不可用、N4 的 ELSE 分支从未触发、阶段 14 采集已随镜像交付、但只是非默认入口（/metrics 默认 404、未鉴权），采集本身未在交付镜像内实测。</a:t>
             </a:r>
           </a:p>
         </p:txBody>
@@ -1490,7 +1490,7 @@
             <a:pPr/>
             <a:r>
               <a:rPr lang="zh-CN" dirty="0"/>
-              <a:t>可观测性与工程 3 条：阶段 14 的代码写了但没进镜像、没实测；web 没有性能数据；parity 只有样例级。</a:t>
+              <a:t>可观测性与工程 3 条：阶段 14 采集已随镜像交付、但只是非默认入口（/metrics 默认 404、未鉴权），采集本身未在交付镜像内实测；前端已过 100 项真实 Chromium 验收、仍缺真实用户可用性验证；单机有界并发基线已测（c=100 无错 566 rps），云端与跨机并发未测；parity 只是样例级等价。</a:t>
             </a:r>
           </a:p>
           <a:p>
@@ -4284,7 +4284,7 @@
                 <a:ea typeface="+mn-ea"/>
                 <a:cs typeface="+mn-cs"/>
               </a:rPr>
-              <a:t>只发一半的请求正文，旧镜像 25 秒窗口内零响应、不关连接。</a:t>
+              <a:t>只发一半的请求正文，旧镜像 45 秒零响应、观察窗 26 秒、不关连接。</a:t>
             </a:r>
           </a:p>
         </p:txBody>
@@ -11506,7 +11506,7 @@
                 <a:ea typeface="+mn-ea"/>
                 <a:cs typeface="+mn-cs"/>
               </a:rPr>
-              <a:t>已过 100 项浏览器验收 / 0 失败；缺并发容量数据</a:t>
+              <a:t>已过 100 项浏览器验收 / 0 失败；并发基线已测 566 rps</a:t>
             </a:r>
           </a:p>
         </p:txBody>

--- a/docs/competition/答辩PPT-GiftWise-修订版-2026-10-31.pptx
+++ b/docs/competition/答辩PPT-GiftWise-修订版-2026-10-31.pptx
@@ -3600,7 +3600,7 @@
                 <a:ea typeface="Microsoft YaHei"/>
                 <a:cs typeface="Consolas"/>
               </a:rPr>
-              <a:t>交付分支 1923 文件内容冻结 · 提交号以 git ls-remote 为准</a:t>
+              <a:t>交付分支 1927 文件内容冻结 · 提交号以 git ls-remote 为准</a:t>
             </a:r>
           </a:p>
         </p:txBody>

--- a/docs/competition/答辩PPT-GiftWise-修订版-2026-10-31.pptx
+++ b/docs/competition/答辩PPT-GiftWise-修订版-2026-10-31.pptx
@@ -353,65 +353,44 @@
           <a:bodyPr/>
           <a:lstStyle/>
           <a:p>
-            <a:pPr/>
-            <a:r>
-              <a:rPr lang="zh-CN" dirty="0"/>
+            <a:r>
               <a:t>口播（约 35 秒）</a:t>
             </a:r>
           </a:p>
-          <a:p>
-            <a:pPr/>
-            <a:endParaRPr lang="zh-CN" dirty="0"/>
-          </a:p>
-          <a:p>
-            <a:pPr/>
-            <a:r>
-              <a:rPr lang="zh-CN" dirty="0"/>
+          <a:p/>
+          <a:p>
+            <a:r>
               <a:t>各位评委好，我们的项目是 GiftWise，一个帮青年解决「送礼送不对」的决策 Agent。</a:t>
             </a:r>
           </a:p>
-          <a:p>
-            <a:pPr/>
-            <a:endParaRPr lang="zh-CN" dirty="0"/>
-          </a:p>
-          <a:p>
-            <a:pPr/>
-            <a:r>
-              <a:rPr lang="zh-CN" dirty="0"/>
+          <a:p/>
+          <a:p>
+            <a:r>
               <a:t>一句话讲清楚它做什么：把「不知道送什么」，变成「知道为什么选、以及怎么送」。</a:t>
             </a:r>
           </a:p>
-          <a:p>
-            <a:pPr/>
-            <a:endParaRPr lang="zh-CN" dirty="0"/>
-          </a:p>
-          <a:p>
-            <a:pPr/>
-            <a:r>
-              <a:rPr lang="zh-CN" dirty="0"/>
+          <a:p/>
+          <a:p>
+            <a:r>
               <a:t>右边这一栏我先主动交代：这些是我们没有做到的部分，一共 15 条，第 8 页会把 15 条一条不落地列出来。</a:t>
             </a:r>
           </a:p>
-          <a:p>
-            <a:pPr/>
-            <a:endParaRPr lang="zh-CN" dirty="0"/>
-          </a:p>
-          <a:p>
-            <a:pPr/>
-            <a:r>
-              <a:rPr lang="zh-CN" dirty="0"/>
+          <a:p/>
+          <a:p>
+            <a:r>
               <a:t>左边是已经有真实证据的 7 条，每一条都可以当场复核。</a:t>
             </a:r>
           </a:p>
-          <a:p>
-            <a:pPr/>
-            <a:endParaRPr lang="zh-CN" dirty="0"/>
-          </a:p>
-          <a:p>
-            <a:pPr/>
-            <a:r>
-              <a:rPr lang="zh-CN" dirty="0"/>
+          <a:p/>
+          <a:p>
+            <a:r>
               <a:t>产品上有一条硬性需求：恋人跟追求对象是两个不同的东西，追求关系不能假定双方已经有恋爱关系。</a:t>
+            </a:r>
+          </a:p>
+          <a:p/>
+          <a:p>
+            <a:r>
+              <a:t>【口径提醒（2026-10-31）】投影正文里的「冷构建 1.720 s」是 **2026-10-30 基线镜像**的实测值；同一行里的 178 MB / 169.676 MiB 与启动 0.668 s 出自 **2026-10-31 01:13:59 重建版镜像**。重建版自己的冷构建实测是 **3,662 ms**（`deploy/evidence/raw/image-rebuild-n1n4/build-timing.txt:1`）。被问到就照实说：**两个合法值、两个时点，引用必须带时点**；不要说成「交付镜像冷构建 1.72 秒」。</a:t>
             </a:r>
           </a:p>
         </p:txBody>
@@ -835,76 +814,50 @@
           <a:bodyPr/>
           <a:lstStyle/>
           <a:p>
-            <a:pPr/>
-            <a:r>
-              <a:rPr lang="zh-CN" dirty="0"/>
+            <a:r>
               <a:t>口播（约 45 秒）</a:t>
             </a:r>
           </a:p>
-          <a:p>
-            <a:pPr/>
-            <a:endParaRPr lang="zh-CN" dirty="0"/>
-          </a:p>
-          <a:p>
-            <a:pPr/>
-            <a:r>
-              <a:rPr lang="zh-CN" dirty="0"/>
+          <a:p/>
+          <a:p>
+            <a:r>
               <a:t>整个方案围绕三个决定：</a:t>
             </a:r>
           </a:p>
-          <a:p>
-            <a:pPr/>
-            <a:endParaRPr lang="zh-CN" dirty="0"/>
-          </a:p>
-          <a:p>
-            <a:pPr/>
-            <a:r>
-              <a:rPr lang="zh-CN" dirty="0"/>
+          <a:p/>
+          <a:p>
+            <a:r>
               <a:t>第一，生成与判定分离。模型只负责生成，硬约束由独立代码判定，模型无权放行。</a:t>
             </a:r>
           </a:p>
-          <a:p>
-            <a:pPr/>
-            <a:endParaRPr lang="zh-CN" dirty="0"/>
-          </a:p>
-          <a:p>
-            <a:pPr/>
-            <a:r>
-              <a:rPr lang="zh-CN" dirty="0"/>
+          <a:p/>
+          <a:p>
+            <a:r>
               <a:t>第二，用户选择放在中间。先出恰好 3 个候选，用户选定之后，才生成包装、配色、贺卡和赠送方式。</a:t>
             </a:r>
           </a:p>
-          <a:p>
-            <a:pPr/>
-            <a:endParaRPr lang="zh-CN" dirty="0"/>
-          </a:p>
-          <a:p>
-            <a:pPr/>
-            <a:r>
-              <a:rPr lang="zh-CN" dirty="0"/>
+          <a:p/>
+          <a:p>
+            <a:r>
               <a:t>第三，可信状态放服务端。API Key 不进前端。</a:t>
             </a:r>
           </a:p>
-          <a:p>
-            <a:pPr/>
-            <a:endParaRPr lang="zh-CN" dirty="0"/>
-          </a:p>
-          <a:p>
-            <a:pPr/>
-            <a:r>
-              <a:rPr lang="zh-CN" dirty="0"/>
+          <a:p/>
+          <a:p>
+            <a:r>
               <a:t>选型表里我特别说明一下最后一行：Docker 只在本机跑过，没有上云、没有推镜像仓库、没有编排平台。这不是我们做不到，是按比赛边界没有采购、没有上传；部署脚本和方案我们已经写好了。</a:t>
             </a:r>
           </a:p>
-          <a:p>
-            <a:pPr/>
-            <a:endParaRPr lang="zh-CN" dirty="0"/>
-          </a:p>
-          <a:p>
-            <a:pPr/>
-            <a:r>
-              <a:rPr lang="zh-CN" dirty="0"/>
+          <a:p/>
+          <a:p>
+            <a:r>
               <a:t>另外 Dify 的版本号是 1.18.0，我们用 GET /console/api/version 实读，stage C 独立复跑过两次；投影上已注明「仓库已核实」，以 1.18.0 为准。</a:t>
+            </a:r>
+          </a:p>
+          <a:p/>
+          <a:p>
+            <a:r>
+              <a:t>【口径提醒（2026-10-31）】投影正文里的「冷构建 1.720 s」是 **2026-10-30 基线镜像**的实测值；同一行里的 178 MB / 169.676 MiB 与启动 0.668 s 出自 **2026-10-31 01:13:59 重建版镜像**。重建版自己的冷构建实测是 **3,662 ms**（`deploy/evidence/raw/image-rebuild-n1n4/build-timing.txt:1`）。被问到就照实说：**两个合法值、两个时点，引用必须带时点**；不要说成「交付镜像冷构建 1.72 秒」。</a:t>
             </a:r>
           </a:p>
         </p:txBody>
@@ -1065,76 +1018,50 @@
           <a:bodyPr/>
           <a:lstStyle/>
           <a:p>
-            <a:pPr/>
-            <a:r>
-              <a:rPr lang="zh-CN" dirty="0"/>
+            <a:r>
               <a:t>口播（约 45 秒）</a:t>
             </a:r>
           </a:p>
-          <a:p>
-            <a:pPr/>
-            <a:endParaRPr lang="zh-CN" dirty="0"/>
-          </a:p>
-          <a:p>
-            <a:pPr/>
-            <a:r>
-              <a:rPr lang="zh-CN" dirty="0"/>
+          <a:p/>
+          <a:p>
+            <a:r>
               <a:t>这一页只放已经有真实证据的东西，7 条。</a:t>
             </a:r>
           </a:p>
-          <a:p>
-            <a:pPr/>
-            <a:endParaRPr lang="zh-CN" dirty="0"/>
-          </a:p>
-          <a:p>
-            <a:pPr/>
-            <a:r>
-              <a:rPr lang="zh-CN" dirty="0"/>
+          <a:p/>
+          <a:p>
+            <a:r>
               <a:t>A1，本机探针 46 条、单元测试 329 条通过（四条互不包含套件 329＋275＋39＋45 合计 688；329 仅为第一条）。</a:t>
             </a:r>
           </a:p>
-          <a:p>
-            <a:pPr/>
-            <a:endParaRPr lang="zh-CN" dirty="0"/>
-          </a:p>
-          <a:p>
-            <a:pPr/>
-            <a:r>
-              <a:rPr lang="zh-CN" dirty="0"/>
+          <a:p/>
+          <a:p>
+            <a:r>
               <a:t>A2，Dify 真实运行：主批次 10 次模型调用、34,127 tokens；累计 13 次、38,326 tokens。这是两个口径，我分开写。</a:t>
             </a:r>
           </a:p>
-          <a:p>
-            <a:pPr/>
-            <a:endParaRPr lang="zh-CN" dirty="0"/>
-          </a:p>
-          <a:p>
-            <a:pPr/>
-            <a:r>
-              <a:rPr lang="zh-CN" dirty="0"/>
+          <a:p/>
+          <a:p>
+            <a:r>
               <a:t>A3，本机 Docker 实测 14 项通过，镜像 178 MB，也就是 169.676 MiB，冷构建 1.720 秒。</a:t>
             </a:r>
           </a:p>
-          <a:p>
-            <a:pPr/>
-            <a:endParaRPr lang="zh-CN" dirty="0"/>
-          </a:p>
-          <a:p>
-            <a:pPr/>
-            <a:r>
-              <a:rPr lang="zh-CN" dirty="0"/>
+          <a:p/>
+          <a:p>
+            <a:r>
               <a:t>A4 比较关键：容器里的校验结果跟我们本机逐字节一致，规则哈希也一致。</a:t>
             </a:r>
           </a:p>
-          <a:p>
-            <a:pPr/>
-            <a:endParaRPr lang="zh-CN" dirty="0"/>
-          </a:p>
-          <a:p>
-            <a:pPr/>
-            <a:r>
-              <a:rPr lang="zh-CN" dirty="0"/>
+          <a:p/>
+          <a:p>
+            <a:r>
               <a:t>底下两行是另行核实和时点说明：322 条是 10 月 30 日那天的真值，329 是 10 月 31 日复跑的值，两个都对，只是时点不同。</a:t>
+            </a:r>
+          </a:p>
+          <a:p/>
+          <a:p>
+            <a:r>
+              <a:t>【口径提醒（2026-10-31）】投影正文里的「冷构建 1.720 s」是 **2026-10-30 基线镜像**的实测值；同一行里的 178 MB / 169.676 MiB 与启动 0.668 s 出自 **2026-10-31 01:13:59 重建版镜像**。重建版自己的冷构建实测是 **3,662 ms**（`deploy/evidence/raw/image-rebuild-n1n4/build-timing.txt:1`）。被问到就照实说：**两个合法值、两个时点，引用必须带时点**；不要说成「交付镜像冷构建 1.72 秒」。</a:t>
             </a:r>
           </a:p>
         </p:txBody>
@@ -1306,54 +1233,38 @@
           <a:bodyPr/>
           <a:lstStyle/>
           <a:p>
-            <a:pPr/>
-            <a:r>
-              <a:rPr lang="zh-CN" dirty="0"/>
+            <a:r>
               <a:t>口播（约 45 秒）</a:t>
             </a:r>
           </a:p>
-          <a:p>
-            <a:pPr/>
-            <a:endParaRPr lang="zh-CN" dirty="0"/>
-          </a:p>
-          <a:p>
-            <a:pPr/>
-            <a:r>
-              <a:rPr lang="zh-CN" dirty="0"/>
+          <a:p/>
+          <a:p>
+            <a:r>
               <a:t>成本这里我强调一个原则：拿不到真实账单的，一律写「未核实」，绝不用估算值充数。</a:t>
             </a:r>
           </a:p>
-          <a:p>
-            <a:pPr/>
-            <a:endParaRPr lang="zh-CN" dirty="0"/>
-          </a:p>
-          <a:p>
-            <a:pPr/>
-            <a:r>
-              <a:rPr lang="zh-CN" dirty="0"/>
+          <a:p/>
+          <a:p>
+            <a:r>
               <a:t>左边是真实运行的数据：主批次 10 次模型调用、34,127 tokens；累计 13 次、38,326 tokens。N2 生成 4.5 到 6 秒，N5 修订 3 到 3.1 秒。</a:t>
             </a:r>
           </a:p>
-          <a:p>
-            <a:pPr/>
-            <a:endParaRPr lang="zh-CN" dirty="0"/>
-          </a:p>
-          <a:p>
-            <a:pPr/>
-            <a:r>
-              <a:rPr lang="zh-CN" dirty="0"/>
+          <a:p/>
+          <a:p>
+            <a:r>
               <a:t>右边是本机容器的数据：镜像 178 MB，也就是 169.676 MiB；冷构建 1.720 秒；启动到健康检查返回 200 是 0.668 秒（均值）；容器内存 14.45 到 17.08 MiB，这是构建时的基线，交付的 latest 镜像重建后还需要复核。</a:t>
             </a:r>
           </a:p>
-          <a:p>
-            <a:pPr/>
-            <a:endParaRPr lang="zh-CN" dirty="0"/>
-          </a:p>
-          <a:p>
-            <a:pPr/>
-            <a:r>
-              <a:rPr lang="zh-CN" dirty="0"/>
+          <a:p/>
+          <a:p>
+            <a:r>
               <a:t>下面琥珀色这条是最重要的：DeepSeek 的单价和单任务成本，我们没有从真实账单核实；云端的资源消耗和跨机延迟，没有测量。</a:t>
+            </a:r>
+          </a:p>
+          <a:p/>
+          <a:p>
+            <a:r>
+              <a:t>【口径提醒（2026-10-31）】投影正文里的「冷构建 1.720 s」是 **2026-10-30 基线镜像**的实测值；同一行里的 178 MB / 169.676 MiB 与启动 0.668 s 出自 **2026-10-31 01:13:59 重建版镜像**。重建版自己的冷构建实测是 **3,662 ms**（`deploy/evidence/raw/image-rebuild-n1n4/build-timing.txt:1`）。被问到就照实说：**两个合法值、两个时点，引用必须带时点**；不要说成「交付镜像冷构建 1.72 秒」。</a:t>
             </a:r>
           </a:p>
         </p:txBody>
@@ -1410,98 +1321,62 @@
           <a:bodyPr/>
           <a:lstStyle/>
           <a:p>
-            <a:pPr/>
-            <a:r>
-              <a:rPr lang="zh-CN" dirty="0"/>
+            <a:r>
               <a:t>口播（约 50 秒）</a:t>
             </a:r>
           </a:p>
-          <a:p>
-            <a:pPr/>
-            <a:endParaRPr lang="zh-CN" dirty="0"/>
-          </a:p>
-          <a:p>
-            <a:pPr/>
-            <a:r>
-              <a:rPr lang="zh-CN" dirty="0"/>
+          <a:p/>
+          <a:p>
+            <a:r>
               <a:t>这一页是整份报告最重要的部分。</a:t>
             </a:r>
           </a:p>
-          <a:p>
-            <a:pPr/>
-            <a:endParaRPr lang="zh-CN" dirty="0"/>
-          </a:p>
-          <a:p>
-            <a:pPr/>
-            <a:r>
-              <a:rPr lang="zh-CN" dirty="0"/>
+          <a:p/>
+          <a:p>
+            <a:r>
               <a:t>左边 7 条是已经实测的，是我们真做出来的。</a:t>
             </a:r>
           </a:p>
-          <a:p>
-            <a:pPr/>
-            <a:endParaRPr lang="zh-CN" dirty="0"/>
-          </a:p>
-          <a:p>
-            <a:pPr/>
-            <a:r>
-              <a:rPr lang="zh-CN" dirty="0"/>
+          <a:p/>
+          <a:p>
+            <a:r>
               <a:t>右边 15 条是我们没有做到的，一条不省、也一条不美化。</a:t>
             </a:r>
           </a:p>
-          <a:p>
-            <a:pPr/>
-            <a:endParaRPr lang="zh-CN" dirty="0"/>
-          </a:p>
-          <a:p>
-            <a:pPr/>
-            <a:r>
-              <a:rPr lang="zh-CN" dirty="0"/>
+          <a:p/>
+          <a:p>
+            <a:r>
               <a:t>云和编排 4 条：云部署从未发生，没有云主机、没有 EIP，UCloud 没有采购；上传脚本从来没有上传过任何文件；没有推送过任何镜像仓库；没有编排平台、没有多副本、没有弹性伸缩。</a:t>
             </a:r>
           </a:p>
-          <a:p>
-            <a:pPr/>
-            <a:endParaRPr lang="zh-CN" dirty="0"/>
-          </a:p>
-          <a:p>
-            <a:pPr/>
-            <a:r>
-              <a:rPr lang="zh-CN" dirty="0"/>
+          <a:p/>
+          <a:p>
+            <a:r>
               <a:t>Dify 5 条：trace 不可用；N4 的 ELSE 分支从未触发；没有自然发生的超预算和禁忌命中证据；修复后的修订路径没有运行时证据；Dify 侧的四个呈现阶段还没有实现。</a:t>
             </a:r>
           </a:p>
-          <a:p>
-            <a:pPr/>
-            <a:endParaRPr lang="zh-CN" dirty="0"/>
-          </a:p>
-          <a:p>
-            <a:pPr/>
-            <a:r>
-              <a:rPr lang="zh-CN" dirty="0"/>
+          <a:p/>
+          <a:p>
+            <a:r>
               <a:t>数据和成本 3 条：价格与库存未核实；单价未从真实账单核实；云端消耗未测量。</a:t>
             </a:r>
           </a:p>
-          <a:p>
-            <a:pPr/>
-            <a:endParaRPr lang="zh-CN" dirty="0"/>
-          </a:p>
-          <a:p>
-            <a:pPr/>
-            <a:r>
-              <a:rPr lang="zh-CN" dirty="0"/>
+          <a:p/>
+          <a:p>
+            <a:r>
               <a:t>可观测性与工程 3 条：阶段 14 采集已随镜像交付、但只是非默认入口（/metrics 默认 404、未鉴权），采集本身未在交付镜像内实测；前端已过 100 项真实 Chromium 验收、仍缺真实用户可用性验证；单机有界并发基线已测（c=100 无错 566 rps），云端与跨机并发未测；parity 只是样例级等价。</a:t>
             </a:r>
           </a:p>
-          <a:p>
-            <a:pPr/>
-            <a:endParaRPr lang="zh-CN" dirty="0"/>
-          </a:p>
-          <a:p>
-            <a:pPr/>
-            <a:r>
-              <a:rPr lang="zh-CN" dirty="0"/>
+          <a:p/>
+          <a:p>
+            <a:r>
               <a:t>底下一行说明：原来的 17 条里有 2 条已经解除了，所以现存 15 条。</a:t>
+            </a:r>
+          </a:p>
+          <a:p/>
+          <a:p>
+            <a:r>
+              <a:t>【口径提醒（2026-10-31）】投影正文里的「冷构建 1.720 s」是 **2026-10-30 基线镜像**的实测值；同一行里的 178 MB / 169.676 MiB 与启动 0.668 s 出自 **2026-10-31 01:13:59 重建版镜像**。重建版自己的冷构建实测是 **3,662 ms**（`deploy/evidence/raw/image-rebuild-n1n4/build-timing.txt:1`）。被问到就照实说：**两个合法值、两个时点，引用必须带时点**；不要说成「交付镜像冷构建 1.72 秒」。</a:t>
             </a:r>
           </a:p>
         </p:txBody>

--- a/docs/competition/答辩PPT-GiftWise-修订版-2026-10-31.pptx
+++ b/docs/competition/答辩PPT-GiftWise-修订版-2026-10-31.pptx
@@ -447,86 +447,49 @@
           <a:bodyPr/>
           <a:lstStyle/>
           <a:p>
-            <a:pPr/>
-            <a:r>
-              <a:rPr lang="zh-CN" dirty="0"/>
+            <a:r>
               <a:t>口播（约 55 秒）</a:t>
             </a:r>
           </a:p>
-          <a:p>
-            <a:pPr/>
-            <a:endParaRPr lang="zh-CN" dirty="0"/>
-          </a:p>
-          <a:p>
-            <a:pPr/>
-            <a:r>
-              <a:rPr lang="zh-CN" dirty="0"/>
+          <a:p/>
+          <a:p>
+            <a:r>
               <a:t>这一页我想讲一个真实的缺陷，以及它的完整闭环。</a:t>
             </a:r>
           </a:p>
-          <a:p>
-            <a:pPr/>
-            <a:endParaRPr lang="zh-CN" dirty="0"/>
-          </a:p>
-          <a:p>
-            <a:pPr/>
-            <a:r>
-              <a:rPr lang="zh-CN" dirty="0"/>
-              <a:t>我们用半开的方式，只发一半的请求正文。旧镜像 25 秒没有任何响应，而且不关闭连接。</a:t>
-            </a:r>
-          </a:p>
-          <a:p>
-            <a:pPr/>
-            <a:endParaRPr lang="zh-CN" dirty="0"/>
-          </a:p>
-          <a:p>
-            <a:pPr/>
-            <a:r>
-              <a:rPr lang="zh-CN" dirty="0"/>
+          <a:p/>
+          <a:p>
+            <a:r>
+              <a:t>我们用半开的方式，只发一半的请求正文。旧镜像 45 秒零响应（观察窗 26 秒）、不关连接，而且不关闭连接。</a:t>
+            </a:r>
+          </a:p>
+          <a:p/>
+          <a:p>
+            <a:r>
               <a:t>最小脚本能稳定复现。定位下来：读请求体的循环没有总时长预算，慢客户端可以把连接一直占住。</a:t>
             </a:r>
           </a:p>
-          <a:p>
-            <a:pPr/>
-            <a:endParaRPr lang="zh-CN" dirty="0"/>
-          </a:p>
-          <a:p>
-            <a:pPr/>
-            <a:r>
-              <a:rPr lang="zh-CN" dirty="0"/>
+          <a:p/>
+          <a:p>
+            <a:r>
               <a:t>修复是加一个读体总时长预算，默认 10 秒，可以用环境变量覆盖，同时改用 read1。</a:t>
             </a:r>
           </a:p>
-          <a:p>
-            <a:pPr/>
-            <a:endParaRPr lang="zh-CN" dirty="0"/>
-          </a:p>
-          <a:p>
-            <a:pPr/>
-            <a:r>
-              <a:rPr lang="zh-CN" dirty="0"/>
+          <a:p/>
+          <a:p>
+            <a:r>
               <a:t>实测结果：修复版 10.02 秒返回 408 Request Timeout，并且正确关闭连接。并发 9 条线程，连接数从 1 升到 10，客户端关闭之后 2.5 秒回落到 1。</a:t>
             </a:r>
           </a:p>
-          <a:p>
-            <a:pPr/>
-            <a:endParaRPr lang="zh-CN" dirty="0"/>
-          </a:p>
-          <a:p>
-            <a:pPr/>
-            <a:r>
-              <a:rPr lang="zh-CN" dirty="0"/>
+          <a:p/>
+          <a:p>
+            <a:r>
               <a:t>最值得说的是第 7 步：健康检查全程返回 200，而且耗时小于 0.02 秒——它会掩盖这个缺陷。</a:t>
             </a:r>
           </a:p>
-          <a:p>
-            <a:pPr/>
-            <a:endParaRPr lang="zh-CN" dirty="0"/>
-          </a:p>
-          <a:p>
-            <a:pPr/>
-            <a:r>
-              <a:rPr lang="zh-CN" dirty="0"/>
+          <a:p/>
+          <a:p>
+            <a:r>
               <a:t>最后一步我要说清楚：上面这些都是主机侧实测；交付的 latest 镜像已经在今天 01:13:59 重建完成，这个修复已经在镜像里生效——容器内同样是约十秒返回 408 并关闭连接。</a:t>
             </a:r>
           </a:p>
